--- a/発表スライド・ポスター/EC79_DAWIY_ポスター.pptx
+++ b/発表スライド・ポスター/EC79_DAWIY_ポスター.pptx
@@ -208,7 +208,7 @@
           <a:p>
             <a:fld id="{22508F7A-9664-4DC4-B15B-5718BC8699CB}" type="datetimeFigureOut">
               <a:rPr kumimoji="1" lang="ja-JP" altLang="en-US" smtClean="0"/>
-              <a:t>2026/2/16</a:t>
+              <a:t>2026/2/21</a:t>
             </a:fld>
             <a:endParaRPr kumimoji="1" lang="ja-JP" altLang="en-US"/>
           </a:p>
@@ -746,7 +746,7 @@
           <a:p>
             <a:fld id="{2FC0DCE9-6D12-4F45-9AD7-B1AAE202024F}" type="datetimeFigureOut">
               <a:rPr kumimoji="1" lang="ja-JP" altLang="en-US" smtClean="0"/>
-              <a:t>2026/2/16</a:t>
+              <a:t>2026/2/21</a:t>
             </a:fld>
             <a:endParaRPr kumimoji="1" lang="ja-JP" altLang="en-US"/>
           </a:p>
@@ -964,7 +964,7 @@
           <a:p>
             <a:fld id="{2FC0DCE9-6D12-4F45-9AD7-B1AAE202024F}" type="datetimeFigureOut">
               <a:rPr kumimoji="1" lang="ja-JP" altLang="en-US" smtClean="0"/>
-              <a:t>2026/2/16</a:t>
+              <a:t>2026/2/21</a:t>
             </a:fld>
             <a:endParaRPr kumimoji="1" lang="ja-JP" altLang="en-US"/>
           </a:p>
@@ -1176,7 +1176,7 @@
           <a:p>
             <a:fld id="{2FC0DCE9-6D12-4F45-9AD7-B1AAE202024F}" type="datetimeFigureOut">
               <a:rPr kumimoji="1" lang="ja-JP" altLang="en-US" smtClean="0"/>
-              <a:t>2026/2/16</a:t>
+              <a:t>2026/2/21</a:t>
             </a:fld>
             <a:endParaRPr kumimoji="1" lang="ja-JP" altLang="en-US"/>
           </a:p>
@@ -1378,7 +1378,7 @@
           <a:p>
             <a:fld id="{2FC0DCE9-6D12-4F45-9AD7-B1AAE202024F}" type="datetimeFigureOut">
               <a:rPr kumimoji="1" lang="ja-JP" altLang="en-US" smtClean="0"/>
-              <a:t>2026/2/16</a:t>
+              <a:t>2026/2/21</a:t>
             </a:fld>
             <a:endParaRPr kumimoji="1" lang="ja-JP" altLang="en-US"/>
           </a:p>
@@ -1624,7 +1624,7 @@
           <a:p>
             <a:fld id="{2FC0DCE9-6D12-4F45-9AD7-B1AAE202024F}" type="datetimeFigureOut">
               <a:rPr kumimoji="1" lang="ja-JP" altLang="en-US" smtClean="0"/>
-              <a:t>2026/2/16</a:t>
+              <a:t>2026/2/21</a:t>
             </a:fld>
             <a:endParaRPr kumimoji="1" lang="ja-JP" altLang="en-US"/>
           </a:p>
@@ -1920,7 +1920,7 @@
           <a:p>
             <a:fld id="{2FC0DCE9-6D12-4F45-9AD7-B1AAE202024F}" type="datetimeFigureOut">
               <a:rPr kumimoji="1" lang="ja-JP" altLang="en-US" smtClean="0"/>
-              <a:t>2026/2/16</a:t>
+              <a:t>2026/2/21</a:t>
             </a:fld>
             <a:endParaRPr kumimoji="1" lang="ja-JP" altLang="en-US"/>
           </a:p>
@@ -2351,7 +2351,7 @@
           <a:p>
             <a:fld id="{2FC0DCE9-6D12-4F45-9AD7-B1AAE202024F}" type="datetimeFigureOut">
               <a:rPr kumimoji="1" lang="ja-JP" altLang="en-US" smtClean="0"/>
-              <a:t>2026/2/16</a:t>
+              <a:t>2026/2/21</a:t>
             </a:fld>
             <a:endParaRPr kumimoji="1" lang="ja-JP" altLang="en-US"/>
           </a:p>
@@ -2469,7 +2469,7 @@
           <a:p>
             <a:fld id="{2FC0DCE9-6D12-4F45-9AD7-B1AAE202024F}" type="datetimeFigureOut">
               <a:rPr kumimoji="1" lang="ja-JP" altLang="en-US" smtClean="0"/>
-              <a:t>2026/2/16</a:t>
+              <a:t>2026/2/21</a:t>
             </a:fld>
             <a:endParaRPr kumimoji="1" lang="ja-JP" altLang="en-US"/>
           </a:p>
@@ -2564,7 +2564,7 @@
           <a:p>
             <a:fld id="{2FC0DCE9-6D12-4F45-9AD7-B1AAE202024F}" type="datetimeFigureOut">
               <a:rPr kumimoji="1" lang="ja-JP" altLang="en-US" smtClean="0"/>
-              <a:t>2026/2/16</a:t>
+              <a:t>2026/2/21</a:t>
             </a:fld>
             <a:endParaRPr kumimoji="1" lang="ja-JP" altLang="en-US"/>
           </a:p>
@@ -2873,7 +2873,7 @@
           <a:p>
             <a:fld id="{2FC0DCE9-6D12-4F45-9AD7-B1AAE202024F}" type="datetimeFigureOut">
               <a:rPr kumimoji="1" lang="ja-JP" altLang="en-US" smtClean="0"/>
-              <a:t>2026/2/16</a:t>
+              <a:t>2026/2/21</a:t>
             </a:fld>
             <a:endParaRPr kumimoji="1" lang="ja-JP" altLang="en-US"/>
           </a:p>
@@ -3130,7 +3130,7 @@
           <a:p>
             <a:fld id="{2FC0DCE9-6D12-4F45-9AD7-B1AAE202024F}" type="datetimeFigureOut">
               <a:rPr kumimoji="1" lang="ja-JP" altLang="en-US" smtClean="0"/>
-              <a:t>2026/2/16</a:t>
+              <a:t>2026/2/21</a:t>
             </a:fld>
             <a:endParaRPr kumimoji="1" lang="ja-JP" altLang="en-US"/>
           </a:p>
@@ -3375,7 +3375,7 @@
           <a:p>
             <a:fld id="{2FC0DCE9-6D12-4F45-9AD7-B1AAE202024F}" type="datetimeFigureOut">
               <a:rPr kumimoji="1" lang="ja-JP" altLang="en-US" smtClean="0"/>
-              <a:t>2026/2/16</a:t>
+              <a:t>2026/2/21</a:t>
             </a:fld>
             <a:endParaRPr kumimoji="1" lang="ja-JP" altLang="en-US"/>
           </a:p>
@@ -10024,6 +10024,42 @@
           </a:fontRef>
         </p:style>
       </p:cxnSp>
+      <p:pic>
+        <p:nvPicPr>
+          <p:cNvPr id="6" name="図 5" descr="ダイアグラム">
+            <a:extLst>
+              <a:ext uri="{FF2B5EF4-FFF2-40B4-BE49-F238E27FC236}">
+                <a16:creationId xmlns:a16="http://schemas.microsoft.com/office/drawing/2014/main" id="{8C892D28-D002-825B-EE18-E09B3054D69B}"/>
+              </a:ext>
+            </a:extLst>
+          </p:cNvPr>
+          <p:cNvPicPr>
+            <a:picLocks noChangeAspect="1"/>
+          </p:cNvPicPr>
+          <p:nvPr/>
+        </p:nvPicPr>
+        <p:blipFill>
+          <a:blip r:embed="rId11">
+            <a:extLst>
+              <a:ext uri="{28A0092B-C50C-407E-A947-70E740481C1C}">
+                <a14:useLocalDpi xmlns:a14="http://schemas.microsoft.com/office/drawing/2010/main" val="0"/>
+              </a:ext>
+            </a:extLst>
+          </a:blip>
+          <a:stretch>
+            <a:fillRect/>
+          </a:stretch>
+        </p:blipFill>
+        <p:spPr>
+          <a:xfrm>
+            <a:off x="660148" y="13248529"/>
+            <a:ext cx="27480127" cy="15457389"/>
+          </a:xfrm>
+          <a:prstGeom prst="rect">
+            <a:avLst/>
+          </a:prstGeom>
+        </p:spPr>
+      </p:pic>
     </p:spTree>
     <p:extLst>
       <p:ext uri="{BB962C8B-B14F-4D97-AF65-F5344CB8AC3E}">

--- a/発表スライド・ポスター/EC79_DAWIY_ポスター.pptx
+++ b/発表スライド・ポスター/EC79_DAWIY_ポスター.pptx
@@ -10046,14 +10046,15 @@
               </a:ext>
             </a:extLst>
           </a:blip>
+          <a:srcRect l="1147" t="291" r="927" b="734"/>
           <a:stretch>
             <a:fillRect/>
           </a:stretch>
         </p:blipFill>
         <p:spPr>
           <a:xfrm>
-            <a:off x="660148" y="13248529"/>
-            <a:ext cx="27480127" cy="15457389"/>
+            <a:off x="876604" y="13293452"/>
+            <a:ext cx="26909968" cy="15298827"/>
           </a:xfrm>
           <a:prstGeom prst="rect">
             <a:avLst/>
